--- a/坐在寶座上聖潔羔羊.pptx
+++ b/坐在寶座上聖潔羔羊.pptx
@@ -215,7 +215,7 @@
             <a:fld id="{007A548E-7098-4CE3-810E-47A3ADCC1150}" type="datetimeFigureOut">
               <a:rPr lang="zh-TW" altLang="en-US" smtClean="0"/>
               <a:pPr/>
-              <a:t>2023/3/18</a:t>
+              <a:t>2026/1/1</a:t>
             </a:fld>
             <a:endParaRPr lang="zh-TW" altLang="en-US"/>
           </a:p>
@@ -281,38 +281,37 @@
           <a:p>
             <a:pPr lvl="0"/>
             <a:r>
-              <a:rPr lang="zh-TW" altLang="en-US" smtClean="0"/>
+              <a:rPr lang="zh-TW" altLang="en-US"/>
               <a:t>按一下以編輯母片文字樣式</a:t>
             </a:r>
           </a:p>
           <a:p>
             <a:pPr lvl="1"/>
             <a:r>
-              <a:rPr lang="zh-TW" altLang="en-US" smtClean="0"/>
+              <a:rPr lang="zh-TW" altLang="en-US"/>
               <a:t>第二層</a:t>
             </a:r>
           </a:p>
           <a:p>
             <a:pPr lvl="2"/>
             <a:r>
-              <a:rPr lang="zh-TW" altLang="en-US" smtClean="0"/>
+              <a:rPr lang="zh-TW" altLang="en-US"/>
               <a:t>第三層</a:t>
             </a:r>
           </a:p>
           <a:p>
             <a:pPr lvl="3"/>
             <a:r>
-              <a:rPr lang="zh-TW" altLang="en-US" smtClean="0"/>
+              <a:rPr lang="zh-TW" altLang="en-US"/>
               <a:t>第四層</a:t>
             </a:r>
           </a:p>
           <a:p>
             <a:pPr lvl="4"/>
             <a:r>
-              <a:rPr lang="zh-TW" altLang="en-US" smtClean="0"/>
+              <a:rPr lang="zh-TW" altLang="en-US"/>
               <a:t>第五層</a:t>
             </a:r>
-            <a:endParaRPr lang="zh-TW" altLang="en-US"/>
           </a:p>
         </p:txBody>
       </p:sp>
@@ -524,10 +523,9 @@
           <a:lstStyle/>
           <a:p>
             <a:r>
-              <a:rPr lang="zh-TW" altLang="en-US" smtClean="0"/>
+              <a:rPr lang="zh-TW" altLang="en-US"/>
               <a:t>按一下以編輯母片標題樣式</a:t>
             </a:r>
-            <a:endParaRPr lang="zh-TW" altLang="en-US"/>
           </a:p>
         </p:txBody>
       </p:sp>
@@ -643,10 +641,9 @@
           </a:lstStyle>
           <a:p>
             <a:r>
-              <a:rPr lang="zh-TW" altLang="en-US" smtClean="0"/>
+              <a:rPr lang="zh-TW" altLang="en-US"/>
               <a:t>按一下以編輯母片副標題樣式</a:t>
             </a:r>
-            <a:endParaRPr lang="zh-TW" altLang="en-US"/>
           </a:p>
         </p:txBody>
       </p:sp>
@@ -668,7 +665,7 @@
             <a:fld id="{14DD3661-1E76-4273-BDC4-E36D4AAA0C58}" type="datetimeFigureOut">
               <a:rPr lang="zh-TW" altLang="en-US" smtClean="0"/>
               <a:pPr/>
-              <a:t>2023/3/18</a:t>
+              <a:t>2026/1/1</a:t>
             </a:fld>
             <a:endParaRPr lang="zh-TW" altLang="en-US"/>
           </a:p>
@@ -758,10 +755,9 @@
           <a:lstStyle/>
           <a:p>
             <a:r>
-              <a:rPr lang="zh-TW" altLang="en-US" smtClean="0"/>
+              <a:rPr lang="zh-TW" altLang="en-US"/>
               <a:t>按一下以編輯母片標題樣式</a:t>
             </a:r>
-            <a:endParaRPr lang="zh-TW" altLang="en-US"/>
           </a:p>
         </p:txBody>
       </p:sp>
@@ -782,38 +778,37 @@
           <a:p>
             <a:pPr lvl="0"/>
             <a:r>
-              <a:rPr lang="zh-TW" altLang="en-US" smtClean="0"/>
+              <a:rPr lang="zh-TW" altLang="en-US"/>
               <a:t>按一下以編輯母片文字樣式</a:t>
             </a:r>
           </a:p>
           <a:p>
             <a:pPr lvl="1"/>
             <a:r>
-              <a:rPr lang="zh-TW" altLang="en-US" smtClean="0"/>
+              <a:rPr lang="zh-TW" altLang="en-US"/>
               <a:t>第二層</a:t>
             </a:r>
           </a:p>
           <a:p>
             <a:pPr lvl="2"/>
             <a:r>
-              <a:rPr lang="zh-TW" altLang="en-US" smtClean="0"/>
+              <a:rPr lang="zh-TW" altLang="en-US"/>
               <a:t>第三層</a:t>
             </a:r>
           </a:p>
           <a:p>
             <a:pPr lvl="3"/>
             <a:r>
-              <a:rPr lang="zh-TW" altLang="en-US" smtClean="0"/>
+              <a:rPr lang="zh-TW" altLang="en-US"/>
               <a:t>第四層</a:t>
             </a:r>
           </a:p>
           <a:p>
             <a:pPr lvl="4"/>
             <a:r>
-              <a:rPr lang="zh-TW" altLang="en-US" smtClean="0"/>
+              <a:rPr lang="zh-TW" altLang="en-US"/>
               <a:t>第五層</a:t>
             </a:r>
-            <a:endParaRPr lang="zh-TW" altLang="en-US"/>
           </a:p>
         </p:txBody>
       </p:sp>
@@ -835,7 +830,7 @@
             <a:fld id="{14DD3661-1E76-4273-BDC4-E36D4AAA0C58}" type="datetimeFigureOut">
               <a:rPr lang="zh-TW" altLang="en-US" smtClean="0"/>
               <a:pPr/>
-              <a:t>2023/3/18</a:t>
+              <a:t>2026/1/1</a:t>
             </a:fld>
             <a:endParaRPr lang="zh-TW" altLang="en-US"/>
           </a:p>
@@ -930,10 +925,9 @@
           <a:lstStyle/>
           <a:p>
             <a:r>
-              <a:rPr lang="zh-TW" altLang="en-US" smtClean="0"/>
+              <a:rPr lang="zh-TW" altLang="en-US"/>
               <a:t>按一下以編輯母片標題樣式</a:t>
             </a:r>
-            <a:endParaRPr lang="zh-TW" altLang="en-US"/>
           </a:p>
         </p:txBody>
       </p:sp>
@@ -959,38 +953,37 @@
           <a:p>
             <a:pPr lvl="0"/>
             <a:r>
-              <a:rPr lang="zh-TW" altLang="en-US" smtClean="0"/>
+              <a:rPr lang="zh-TW" altLang="en-US"/>
               <a:t>按一下以編輯母片文字樣式</a:t>
             </a:r>
           </a:p>
           <a:p>
             <a:pPr lvl="1"/>
             <a:r>
-              <a:rPr lang="zh-TW" altLang="en-US" smtClean="0"/>
+              <a:rPr lang="zh-TW" altLang="en-US"/>
               <a:t>第二層</a:t>
             </a:r>
           </a:p>
           <a:p>
             <a:pPr lvl="2"/>
             <a:r>
-              <a:rPr lang="zh-TW" altLang="en-US" smtClean="0"/>
+              <a:rPr lang="zh-TW" altLang="en-US"/>
               <a:t>第三層</a:t>
             </a:r>
           </a:p>
           <a:p>
             <a:pPr lvl="3"/>
             <a:r>
-              <a:rPr lang="zh-TW" altLang="en-US" smtClean="0"/>
+              <a:rPr lang="zh-TW" altLang="en-US"/>
               <a:t>第四層</a:t>
             </a:r>
           </a:p>
           <a:p>
             <a:pPr lvl="4"/>
             <a:r>
-              <a:rPr lang="zh-TW" altLang="en-US" smtClean="0"/>
+              <a:rPr lang="zh-TW" altLang="en-US"/>
               <a:t>第五層</a:t>
             </a:r>
-            <a:endParaRPr lang="zh-TW" altLang="en-US"/>
           </a:p>
         </p:txBody>
       </p:sp>
@@ -1012,7 +1005,7 @@
             <a:fld id="{14DD3661-1E76-4273-BDC4-E36D4AAA0C58}" type="datetimeFigureOut">
               <a:rPr lang="zh-TW" altLang="en-US" smtClean="0"/>
               <a:pPr/>
-              <a:t>2023/3/18</a:t>
+              <a:t>2026/1/1</a:t>
             </a:fld>
             <a:endParaRPr lang="zh-TW" altLang="en-US"/>
           </a:p>
@@ -1102,10 +1095,9 @@
           <a:lstStyle/>
           <a:p>
             <a:r>
-              <a:rPr lang="zh-TW" altLang="en-US" smtClean="0"/>
+              <a:rPr lang="zh-TW" altLang="en-US"/>
               <a:t>按一下以編輯母片標題樣式</a:t>
             </a:r>
-            <a:endParaRPr lang="zh-TW" altLang="en-US"/>
           </a:p>
         </p:txBody>
       </p:sp>
@@ -1126,38 +1118,37 @@
           <a:p>
             <a:pPr lvl="0"/>
             <a:r>
-              <a:rPr lang="zh-TW" altLang="en-US" smtClean="0"/>
+              <a:rPr lang="zh-TW" altLang="en-US"/>
               <a:t>按一下以編輯母片文字樣式</a:t>
             </a:r>
           </a:p>
           <a:p>
             <a:pPr lvl="1"/>
             <a:r>
-              <a:rPr lang="zh-TW" altLang="en-US" smtClean="0"/>
+              <a:rPr lang="zh-TW" altLang="en-US"/>
               <a:t>第二層</a:t>
             </a:r>
           </a:p>
           <a:p>
             <a:pPr lvl="2"/>
             <a:r>
-              <a:rPr lang="zh-TW" altLang="en-US" smtClean="0"/>
+              <a:rPr lang="zh-TW" altLang="en-US"/>
               <a:t>第三層</a:t>
             </a:r>
           </a:p>
           <a:p>
             <a:pPr lvl="3"/>
             <a:r>
-              <a:rPr lang="zh-TW" altLang="en-US" smtClean="0"/>
+              <a:rPr lang="zh-TW" altLang="en-US"/>
               <a:t>第四層</a:t>
             </a:r>
           </a:p>
           <a:p>
             <a:pPr lvl="4"/>
             <a:r>
-              <a:rPr lang="zh-TW" altLang="en-US" smtClean="0"/>
+              <a:rPr lang="zh-TW" altLang="en-US"/>
               <a:t>第五層</a:t>
             </a:r>
-            <a:endParaRPr lang="zh-TW" altLang="en-US"/>
           </a:p>
         </p:txBody>
       </p:sp>
@@ -1179,7 +1170,7 @@
             <a:fld id="{14DD3661-1E76-4273-BDC4-E36D4AAA0C58}" type="datetimeFigureOut">
               <a:rPr lang="zh-TW" altLang="en-US" smtClean="0"/>
               <a:pPr/>
-              <a:t>2023/3/18</a:t>
+              <a:t>2026/1/1</a:t>
             </a:fld>
             <a:endParaRPr lang="zh-TW" altLang="en-US"/>
           </a:p>
@@ -1278,10 +1269,9 @@
           </a:lstStyle>
           <a:p>
             <a:r>
-              <a:rPr lang="zh-TW" altLang="en-US" smtClean="0"/>
+              <a:rPr lang="zh-TW" altLang="en-US"/>
               <a:t>按一下以編輯母片標題樣式</a:t>
             </a:r>
-            <a:endParaRPr lang="zh-TW" altLang="en-US"/>
           </a:p>
         </p:txBody>
       </p:sp>
@@ -1398,7 +1388,7 @@
           <a:p>
             <a:pPr lvl="0"/>
             <a:r>
-              <a:rPr lang="zh-TW" altLang="en-US" smtClean="0"/>
+              <a:rPr lang="zh-TW" altLang="en-US"/>
               <a:t>按一下以編輯母片文字樣式</a:t>
             </a:r>
           </a:p>
@@ -1422,7 +1412,7 @@
             <a:fld id="{14DD3661-1E76-4273-BDC4-E36D4AAA0C58}" type="datetimeFigureOut">
               <a:rPr lang="zh-TW" altLang="en-US" smtClean="0"/>
               <a:pPr/>
-              <a:t>2023/3/18</a:t>
+              <a:t>2026/1/1</a:t>
             </a:fld>
             <a:endParaRPr lang="zh-TW" altLang="en-US"/>
           </a:p>
@@ -1512,10 +1502,9 @@
           <a:lstStyle/>
           <a:p>
             <a:r>
-              <a:rPr lang="zh-TW" altLang="en-US" smtClean="0"/>
+              <a:rPr lang="zh-TW" altLang="en-US"/>
               <a:t>按一下以編輯母片標題樣式</a:t>
             </a:r>
-            <a:endParaRPr lang="zh-TW" altLang="en-US"/>
           </a:p>
         </p:txBody>
       </p:sp>
@@ -1569,38 +1558,37 @@
           <a:p>
             <a:pPr lvl="0"/>
             <a:r>
-              <a:rPr lang="zh-TW" altLang="en-US" smtClean="0"/>
+              <a:rPr lang="zh-TW" altLang="en-US"/>
               <a:t>按一下以編輯母片文字樣式</a:t>
             </a:r>
           </a:p>
           <a:p>
             <a:pPr lvl="1"/>
             <a:r>
-              <a:rPr lang="zh-TW" altLang="en-US" smtClean="0"/>
+              <a:rPr lang="zh-TW" altLang="en-US"/>
               <a:t>第二層</a:t>
             </a:r>
           </a:p>
           <a:p>
             <a:pPr lvl="2"/>
             <a:r>
-              <a:rPr lang="zh-TW" altLang="en-US" smtClean="0"/>
+              <a:rPr lang="zh-TW" altLang="en-US"/>
               <a:t>第三層</a:t>
             </a:r>
           </a:p>
           <a:p>
             <a:pPr lvl="3"/>
             <a:r>
-              <a:rPr lang="zh-TW" altLang="en-US" smtClean="0"/>
+              <a:rPr lang="zh-TW" altLang="en-US"/>
               <a:t>第四層</a:t>
             </a:r>
           </a:p>
           <a:p>
             <a:pPr lvl="4"/>
             <a:r>
-              <a:rPr lang="zh-TW" altLang="en-US" smtClean="0"/>
+              <a:rPr lang="zh-TW" altLang="en-US"/>
               <a:t>第五層</a:t>
             </a:r>
-            <a:endParaRPr lang="zh-TW" altLang="en-US"/>
           </a:p>
         </p:txBody>
       </p:sp>
@@ -1654,38 +1642,37 @@
           <a:p>
             <a:pPr lvl="0"/>
             <a:r>
-              <a:rPr lang="zh-TW" altLang="en-US" smtClean="0"/>
+              <a:rPr lang="zh-TW" altLang="en-US"/>
               <a:t>按一下以編輯母片文字樣式</a:t>
             </a:r>
           </a:p>
           <a:p>
             <a:pPr lvl="1"/>
             <a:r>
-              <a:rPr lang="zh-TW" altLang="en-US" smtClean="0"/>
+              <a:rPr lang="zh-TW" altLang="en-US"/>
               <a:t>第二層</a:t>
             </a:r>
           </a:p>
           <a:p>
             <a:pPr lvl="2"/>
             <a:r>
-              <a:rPr lang="zh-TW" altLang="en-US" smtClean="0"/>
+              <a:rPr lang="zh-TW" altLang="en-US"/>
               <a:t>第三層</a:t>
             </a:r>
           </a:p>
           <a:p>
             <a:pPr lvl="3"/>
             <a:r>
-              <a:rPr lang="zh-TW" altLang="en-US" smtClean="0"/>
+              <a:rPr lang="zh-TW" altLang="en-US"/>
               <a:t>第四層</a:t>
             </a:r>
           </a:p>
           <a:p>
             <a:pPr lvl="4"/>
             <a:r>
-              <a:rPr lang="zh-TW" altLang="en-US" smtClean="0"/>
+              <a:rPr lang="zh-TW" altLang="en-US"/>
               <a:t>第五層</a:t>
             </a:r>
-            <a:endParaRPr lang="zh-TW" altLang="en-US"/>
           </a:p>
         </p:txBody>
       </p:sp>
@@ -1707,7 +1694,7 @@
             <a:fld id="{14DD3661-1E76-4273-BDC4-E36D4AAA0C58}" type="datetimeFigureOut">
               <a:rPr lang="zh-TW" altLang="en-US" smtClean="0"/>
               <a:pPr/>
-              <a:t>2023/3/18</a:t>
+              <a:t>2026/1/1</a:t>
             </a:fld>
             <a:endParaRPr lang="zh-TW" altLang="en-US"/>
           </a:p>
@@ -1801,10 +1788,9 @@
           </a:lstStyle>
           <a:p>
             <a:r>
-              <a:rPr lang="zh-TW" altLang="en-US" smtClean="0"/>
+              <a:rPr lang="zh-TW" altLang="en-US"/>
               <a:t>按一下以編輯母片標題樣式</a:t>
             </a:r>
-            <a:endParaRPr lang="zh-TW" altLang="en-US"/>
           </a:p>
         </p:txBody>
       </p:sp>
@@ -1867,7 +1853,7 @@
           <a:p>
             <a:pPr lvl="0"/>
             <a:r>
-              <a:rPr lang="zh-TW" altLang="en-US" smtClean="0"/>
+              <a:rPr lang="zh-TW" altLang="en-US"/>
               <a:t>按一下以編輯母片文字樣式</a:t>
             </a:r>
           </a:p>
@@ -1923,38 +1909,37 @@
           <a:p>
             <a:pPr lvl="0"/>
             <a:r>
-              <a:rPr lang="zh-TW" altLang="en-US" smtClean="0"/>
+              <a:rPr lang="zh-TW" altLang="en-US"/>
               <a:t>按一下以編輯母片文字樣式</a:t>
             </a:r>
           </a:p>
           <a:p>
             <a:pPr lvl="1"/>
             <a:r>
-              <a:rPr lang="zh-TW" altLang="en-US" smtClean="0"/>
+              <a:rPr lang="zh-TW" altLang="en-US"/>
               <a:t>第二層</a:t>
             </a:r>
           </a:p>
           <a:p>
             <a:pPr lvl="2"/>
             <a:r>
-              <a:rPr lang="zh-TW" altLang="en-US" smtClean="0"/>
+              <a:rPr lang="zh-TW" altLang="en-US"/>
               <a:t>第三層</a:t>
             </a:r>
           </a:p>
           <a:p>
             <a:pPr lvl="3"/>
             <a:r>
-              <a:rPr lang="zh-TW" altLang="en-US" smtClean="0"/>
+              <a:rPr lang="zh-TW" altLang="en-US"/>
               <a:t>第四層</a:t>
             </a:r>
           </a:p>
           <a:p>
             <a:pPr lvl="4"/>
             <a:r>
-              <a:rPr lang="zh-TW" altLang="en-US" smtClean="0"/>
+              <a:rPr lang="zh-TW" altLang="en-US"/>
               <a:t>第五層</a:t>
             </a:r>
-            <a:endParaRPr lang="zh-TW" altLang="en-US"/>
           </a:p>
         </p:txBody>
       </p:sp>
@@ -2017,7 +2002,7 @@
           <a:p>
             <a:pPr lvl="0"/>
             <a:r>
-              <a:rPr lang="zh-TW" altLang="en-US" smtClean="0"/>
+              <a:rPr lang="zh-TW" altLang="en-US"/>
               <a:t>按一下以編輯母片文字樣式</a:t>
             </a:r>
           </a:p>
@@ -2073,38 +2058,37 @@
           <a:p>
             <a:pPr lvl="0"/>
             <a:r>
-              <a:rPr lang="zh-TW" altLang="en-US" smtClean="0"/>
+              <a:rPr lang="zh-TW" altLang="en-US"/>
               <a:t>按一下以編輯母片文字樣式</a:t>
             </a:r>
           </a:p>
           <a:p>
             <a:pPr lvl="1"/>
             <a:r>
-              <a:rPr lang="zh-TW" altLang="en-US" smtClean="0"/>
+              <a:rPr lang="zh-TW" altLang="en-US"/>
               <a:t>第二層</a:t>
             </a:r>
           </a:p>
           <a:p>
             <a:pPr lvl="2"/>
             <a:r>
-              <a:rPr lang="zh-TW" altLang="en-US" smtClean="0"/>
+              <a:rPr lang="zh-TW" altLang="en-US"/>
               <a:t>第三層</a:t>
             </a:r>
           </a:p>
           <a:p>
             <a:pPr lvl="3"/>
             <a:r>
-              <a:rPr lang="zh-TW" altLang="en-US" smtClean="0"/>
+              <a:rPr lang="zh-TW" altLang="en-US"/>
               <a:t>第四層</a:t>
             </a:r>
           </a:p>
           <a:p>
             <a:pPr lvl="4"/>
             <a:r>
-              <a:rPr lang="zh-TW" altLang="en-US" smtClean="0"/>
+              <a:rPr lang="zh-TW" altLang="en-US"/>
               <a:t>第五層</a:t>
             </a:r>
-            <a:endParaRPr lang="zh-TW" altLang="en-US"/>
           </a:p>
         </p:txBody>
       </p:sp>
@@ -2126,7 +2110,7 @@
             <a:fld id="{14DD3661-1E76-4273-BDC4-E36D4AAA0C58}" type="datetimeFigureOut">
               <a:rPr lang="zh-TW" altLang="en-US" smtClean="0"/>
               <a:pPr/>
-              <a:t>2023/3/18</a:t>
+              <a:t>2026/1/1</a:t>
             </a:fld>
             <a:endParaRPr lang="zh-TW" altLang="en-US"/>
           </a:p>
@@ -2216,10 +2200,9 @@
           <a:lstStyle/>
           <a:p>
             <a:r>
-              <a:rPr lang="zh-TW" altLang="en-US" smtClean="0"/>
+              <a:rPr lang="zh-TW" altLang="en-US"/>
               <a:t>按一下以編輯母片標題樣式</a:t>
             </a:r>
-            <a:endParaRPr lang="zh-TW" altLang="en-US"/>
           </a:p>
         </p:txBody>
       </p:sp>
@@ -2241,7 +2224,7 @@
             <a:fld id="{14DD3661-1E76-4273-BDC4-E36D4AAA0C58}" type="datetimeFigureOut">
               <a:rPr lang="zh-TW" altLang="en-US" smtClean="0"/>
               <a:pPr/>
-              <a:t>2023/3/18</a:t>
+              <a:t>2026/1/1</a:t>
             </a:fld>
             <a:endParaRPr lang="zh-TW" altLang="en-US"/>
           </a:p>
@@ -2333,7 +2316,7 @@
             <a:fld id="{14DD3661-1E76-4273-BDC4-E36D4AAA0C58}" type="datetimeFigureOut">
               <a:rPr lang="zh-TW" altLang="en-US" smtClean="0"/>
               <a:pPr/>
-              <a:t>2023/3/18</a:t>
+              <a:t>2026/1/1</a:t>
             </a:fld>
             <a:endParaRPr lang="zh-TW" altLang="en-US"/>
           </a:p>
@@ -2432,10 +2415,9 @@
           </a:lstStyle>
           <a:p>
             <a:r>
-              <a:rPr lang="zh-TW" altLang="en-US" smtClean="0"/>
+              <a:rPr lang="zh-TW" altLang="en-US"/>
               <a:t>按一下以編輯母片標題樣式</a:t>
             </a:r>
-            <a:endParaRPr lang="zh-TW" altLang="en-US"/>
           </a:p>
         </p:txBody>
       </p:sp>
@@ -2489,38 +2471,37 @@
           <a:p>
             <a:pPr lvl="0"/>
             <a:r>
-              <a:rPr lang="zh-TW" altLang="en-US" smtClean="0"/>
+              <a:rPr lang="zh-TW" altLang="en-US"/>
               <a:t>按一下以編輯母片文字樣式</a:t>
             </a:r>
           </a:p>
           <a:p>
             <a:pPr lvl="1"/>
             <a:r>
-              <a:rPr lang="zh-TW" altLang="en-US" smtClean="0"/>
+              <a:rPr lang="zh-TW" altLang="en-US"/>
               <a:t>第二層</a:t>
             </a:r>
           </a:p>
           <a:p>
             <a:pPr lvl="2"/>
             <a:r>
-              <a:rPr lang="zh-TW" altLang="en-US" smtClean="0"/>
+              <a:rPr lang="zh-TW" altLang="en-US"/>
               <a:t>第三層</a:t>
             </a:r>
           </a:p>
           <a:p>
             <a:pPr lvl="3"/>
             <a:r>
-              <a:rPr lang="zh-TW" altLang="en-US" smtClean="0"/>
+              <a:rPr lang="zh-TW" altLang="en-US"/>
               <a:t>第四層</a:t>
             </a:r>
           </a:p>
           <a:p>
             <a:pPr lvl="4"/>
             <a:r>
-              <a:rPr lang="zh-TW" altLang="en-US" smtClean="0"/>
+              <a:rPr lang="zh-TW" altLang="en-US"/>
               <a:t>第五層</a:t>
             </a:r>
-            <a:endParaRPr lang="zh-TW" altLang="en-US"/>
           </a:p>
         </p:txBody>
       </p:sp>
@@ -2583,7 +2564,7 @@
           <a:p>
             <a:pPr lvl="0"/>
             <a:r>
-              <a:rPr lang="zh-TW" altLang="en-US" smtClean="0"/>
+              <a:rPr lang="zh-TW" altLang="en-US"/>
               <a:t>按一下以編輯母片文字樣式</a:t>
             </a:r>
           </a:p>
@@ -2607,7 +2588,7 @@
             <a:fld id="{14DD3661-1E76-4273-BDC4-E36D4AAA0C58}" type="datetimeFigureOut">
               <a:rPr lang="zh-TW" altLang="en-US" smtClean="0"/>
               <a:pPr/>
-              <a:t>2023/3/18</a:t>
+              <a:t>2026/1/1</a:t>
             </a:fld>
             <a:endParaRPr lang="zh-TW" altLang="en-US"/>
           </a:p>
@@ -2706,10 +2687,9 @@
           </a:lstStyle>
           <a:p>
             <a:r>
-              <a:rPr lang="zh-TW" altLang="en-US" smtClean="0"/>
+              <a:rPr lang="zh-TW" altLang="en-US"/>
               <a:t>按一下以編輯母片標題樣式</a:t>
             </a:r>
-            <a:endParaRPr lang="zh-TW" altLang="en-US"/>
           </a:p>
         </p:txBody>
       </p:sp>
@@ -2771,10 +2751,9 @@
           </a:lstStyle>
           <a:p>
             <a:r>
-              <a:rPr lang="zh-TW" altLang="en-US" smtClean="0"/>
+              <a:rPr lang="zh-TW" altLang="en-US"/>
               <a:t>按一下圖示以新增圖片</a:t>
             </a:r>
-            <a:endParaRPr lang="zh-TW" altLang="en-US"/>
           </a:p>
         </p:txBody>
       </p:sp>
@@ -2837,7 +2816,7 @@
           <a:p>
             <a:pPr lvl="0"/>
             <a:r>
-              <a:rPr lang="zh-TW" altLang="en-US" smtClean="0"/>
+              <a:rPr lang="zh-TW" altLang="en-US"/>
               <a:t>按一下以編輯母片文字樣式</a:t>
             </a:r>
           </a:p>
@@ -2861,7 +2840,7 @@
             <a:fld id="{14DD3661-1E76-4273-BDC4-E36D4AAA0C58}" type="datetimeFigureOut">
               <a:rPr lang="zh-TW" altLang="en-US" smtClean="0"/>
               <a:pPr/>
-              <a:t>2023/3/18</a:t>
+              <a:t>2026/1/1</a:t>
             </a:fld>
             <a:endParaRPr lang="zh-TW" altLang="en-US"/>
           </a:p>
@@ -2971,10 +2950,9 @@
           <a:lstStyle/>
           <a:p>
             <a:r>
-              <a:rPr lang="zh-TW" altLang="en-US" smtClean="0"/>
+              <a:rPr lang="zh-TW" altLang="en-US"/>
               <a:t>按一下以編輯母片標題樣式</a:t>
             </a:r>
-            <a:endParaRPr lang="zh-TW" altLang="en-US"/>
           </a:p>
         </p:txBody>
       </p:sp>
@@ -3005,38 +2983,37 @@
           <a:p>
             <a:pPr lvl="0"/>
             <a:r>
-              <a:rPr lang="zh-TW" altLang="en-US" smtClean="0"/>
+              <a:rPr lang="zh-TW" altLang="en-US"/>
               <a:t>按一下以編輯母片文字樣式</a:t>
             </a:r>
           </a:p>
           <a:p>
             <a:pPr lvl="1"/>
             <a:r>
-              <a:rPr lang="zh-TW" altLang="en-US" smtClean="0"/>
+              <a:rPr lang="zh-TW" altLang="en-US"/>
               <a:t>第二層</a:t>
             </a:r>
           </a:p>
           <a:p>
             <a:pPr lvl="2"/>
             <a:r>
-              <a:rPr lang="zh-TW" altLang="en-US" smtClean="0"/>
+              <a:rPr lang="zh-TW" altLang="en-US"/>
               <a:t>第三層</a:t>
             </a:r>
           </a:p>
           <a:p>
             <a:pPr lvl="3"/>
             <a:r>
-              <a:rPr lang="zh-TW" altLang="en-US" smtClean="0"/>
+              <a:rPr lang="zh-TW" altLang="en-US"/>
               <a:t>第四層</a:t>
             </a:r>
           </a:p>
           <a:p>
             <a:pPr lvl="4"/>
             <a:r>
-              <a:rPr lang="zh-TW" altLang="en-US" smtClean="0"/>
+              <a:rPr lang="zh-TW" altLang="en-US"/>
               <a:t>第五層</a:t>
             </a:r>
-            <a:endParaRPr lang="zh-TW" altLang="en-US"/>
           </a:p>
         </p:txBody>
       </p:sp>
@@ -3076,7 +3053,7 @@
             <a:fld id="{14DD3661-1E76-4273-BDC4-E36D4AAA0C58}" type="datetimeFigureOut">
               <a:rPr lang="zh-TW" altLang="en-US" smtClean="0"/>
               <a:pPr/>
-              <a:t>2023/3/18</a:t>
+              <a:t>2026/1/1</a:t>
             </a:fld>
             <a:endParaRPr lang="zh-TW" altLang="en-US"/>
           </a:p>
@@ -3470,7 +3447,7 @@
           <a:lstStyle/>
           <a:p>
             <a:r>
-              <a:rPr lang="zh-TW" altLang="en-US" sz="5400" b="1" i="1" dirty="0" smtClean="0">
+              <a:rPr lang="zh-TW" altLang="en-US" sz="5400" b="1" i="1" dirty="0">
                 <a:solidFill>
                   <a:srgbClr val="660033"/>
                 </a:solidFill>
@@ -3484,24 +3461,7 @@
                 <a:latin typeface="微軟正黑體" pitchFamily="34" charset="-120"/>
                 <a:ea typeface="微軟正黑體" pitchFamily="34" charset="-120"/>
               </a:rPr>
-              <a:t>坐</a:t>
-            </a:r>
-            <a:r>
-              <a:rPr lang="zh-TW" altLang="en-US" sz="5400" b="1" i="1" dirty="0">
-                <a:solidFill>
-                  <a:srgbClr val="660033"/>
-                </a:solidFill>
-                <a:effectLst>
-                  <a:outerShdw blurRad="38100" dist="38100" dir="2700000" algn="tl">
-                    <a:srgbClr val="000000">
-                      <a:alpha val="43137"/>
-                    </a:srgbClr>
-                  </a:outerShdw>
-                </a:effectLst>
-                <a:latin typeface="微軟正黑體" pitchFamily="34" charset="-120"/>
-                <a:ea typeface="微軟正黑體" pitchFamily="34" charset="-120"/>
-              </a:rPr>
-              <a:t>在寶座上聖潔羔羊</a:t>
+              <a:t>坐在寶座上聖潔羔羊</a:t>
             </a:r>
           </a:p>
         </p:txBody>
@@ -3516,13 +3476,6 @@
   <p:clrMapOvr>
     <a:masterClrMapping/>
   </p:clrMapOvr>
-  <p:timing>
-    <p:tnLst>
-      <p:par>
-        <p:cTn id="1" dur="indefinite" restart="never" nodeType="tmRoot"/>
-      </p:par>
-    </p:tnLst>
-  </p:timing>
 </p:sld>
 </file>
 
@@ -3591,27 +3544,7 @@
                 <a:latin typeface="微軟正黑體" pitchFamily="34" charset="-120"/>
                 <a:ea typeface="微軟正黑體" pitchFamily="34" charset="-120"/>
               </a:rPr>
-              <a:t>我們俯伏敬</a:t>
-            </a:r>
-            <a:r>
-              <a:rPr lang="zh-TW" altLang="en-US" sz="4800" b="1" dirty="0">
-                <a:solidFill>
-                  <a:srgbClr val="660033"/>
-                </a:solidFill>
-                <a:latin typeface="微軟正黑體" pitchFamily="34" charset="-120"/>
-                <a:ea typeface="微軟正黑體" pitchFamily="34" charset="-120"/>
-              </a:rPr>
-              <a:t>拜</a:t>
-            </a:r>
-            <a:r>
-              <a:rPr lang="zh-TW" altLang="en-US" sz="4800" b="1" dirty="0">
-                <a:solidFill>
-                  <a:srgbClr val="660033"/>
-                </a:solidFill>
-                <a:latin typeface="微軟正黑體" pitchFamily="34" charset="-120"/>
-                <a:ea typeface="微軟正黑體" pitchFamily="34" charset="-120"/>
-              </a:rPr>
-              <a:t>祢</a:t>
+              <a:t>我們俯伏敬拜祢</a:t>
             </a:r>
           </a:p>
         </p:txBody>
@@ -3651,7 +3584,7 @@
               <a:t>( </a:t>
             </a:r>
             <a:r>
-              <a:rPr lang="zh-CN" altLang="en-US" sz="2800" b="1" dirty="0" smtClean="0">
+              <a:rPr lang="zh-CN" altLang="en-US" sz="2800" b="1" dirty="0">
                 <a:solidFill>
                   <a:srgbClr val="660033"/>
                 </a:solidFill>
@@ -3659,10 +3592,10 @@
                 <a:latin typeface="Microsoft JhengHei" panose="020B0604030504040204" pitchFamily="34" charset="-120"/>
                 <a:ea typeface="Microsoft JhengHei" panose="020B0604030504040204" pitchFamily="34" charset="-120"/>
               </a:rPr>
-              <a:t>正</a:t>
-            </a:r>
-            <a:r>
-              <a:rPr lang="en-US" altLang="zh-CN" sz="2800" b="1" dirty="0" smtClean="0">
+              <a:t>正歌</a:t>
+            </a:r>
+            <a:r>
+              <a:rPr lang="en-US" altLang="zh-CN" sz="2800" b="1" dirty="0">
                 <a:solidFill>
                   <a:srgbClr val="660033"/>
                 </a:solidFill>
@@ -3673,7 +3606,7 @@
               <a:t> </a:t>
             </a:r>
             <a:r>
-              <a:rPr lang="en-US" sz="2800" b="1" dirty="0" smtClean="0">
+              <a:rPr lang="en-US" sz="2800" b="1" dirty="0">
                 <a:solidFill>
                   <a:srgbClr val="660033"/>
                 </a:solidFill>
@@ -3703,13 +3636,6 @@
   <p:clrMapOvr>
     <a:masterClrMapping/>
   </p:clrMapOvr>
-  <p:timing>
-    <p:tnLst>
-      <p:par>
-        <p:cTn id="1" dur="indefinite" restart="never" nodeType="tmRoot"/>
-      </p:par>
-    </p:tnLst>
-  </p:timing>
 </p:sld>
 </file>
 
@@ -3763,62 +3689,22 @@
                 <a:latin typeface="微軟正黑體" pitchFamily="34" charset="-120"/>
                 <a:ea typeface="微軟正黑體" pitchFamily="34" charset="-120"/>
               </a:rPr>
-              <a:t>昔在 </a:t>
-            </a:r>
-            <a:r>
-              <a:rPr lang="zh-TW" altLang="en-US" sz="4800" b="1" dirty="0" smtClean="0">
+              <a:t>昔在  今在以後永在</a:t>
+            </a:r>
+          </a:p>
+          <a:p>
+            <a:pPr algn="ctr">
+              <a:buNone/>
+            </a:pPr>
+            <a:r>
+              <a:rPr lang="zh-TW" altLang="en-US" sz="4800" b="1" dirty="0">
                 <a:solidFill>
                   <a:srgbClr val="660033"/>
                 </a:solidFill>
                 <a:latin typeface="微軟正黑體" pitchFamily="34" charset="-120"/>
                 <a:ea typeface="微軟正黑體" pitchFamily="34" charset="-120"/>
               </a:rPr>
-              <a:t> 今</a:t>
-            </a:r>
-            <a:r>
-              <a:rPr lang="zh-TW" altLang="en-US" sz="4800" b="1" dirty="0">
-                <a:solidFill>
-                  <a:srgbClr val="660033"/>
-                </a:solidFill>
-                <a:latin typeface="微軟正黑體" pitchFamily="34" charset="-120"/>
-                <a:ea typeface="微軟正黑體" pitchFamily="34" charset="-120"/>
-              </a:rPr>
-              <a:t>在以後永在</a:t>
-            </a:r>
-          </a:p>
-          <a:p>
-            <a:pPr algn="ctr">
-              <a:buNone/>
-            </a:pPr>
-            <a:r>
-              <a:rPr lang="zh-TW" altLang="en-US" sz="4800" b="1" dirty="0">
-                <a:solidFill>
-                  <a:srgbClr val="660033"/>
-                </a:solidFill>
-                <a:latin typeface="微軟正黑體" pitchFamily="34" charset="-120"/>
-                <a:ea typeface="微軟正黑體" pitchFamily="34" charset="-120"/>
-              </a:rPr>
-              <a:t>唯</a:t>
-            </a:r>
-            <a:r>
-              <a:rPr lang="zh-TW" altLang="en-US" sz="4800" b="1" dirty="0">
-                <a:solidFill>
-                  <a:srgbClr val="660033"/>
-                </a:solidFill>
-                <a:latin typeface="微軟正黑體" pitchFamily="34" charset="-120"/>
-                <a:ea typeface="微軟正黑體" pitchFamily="34" charset="-120"/>
-              </a:rPr>
-              <a:t>有祢是</a:t>
-            </a:r>
-            <a:r>
-              <a:rPr lang="zh-TW" altLang="en-US" sz="4800" b="1" dirty="0">
-                <a:solidFill>
-                  <a:srgbClr val="660033"/>
-                </a:solidFill>
-                <a:latin typeface="微軟正黑體" pitchFamily="34" charset="-120"/>
-                <a:ea typeface="微軟正黑體" pitchFamily="34" charset="-120"/>
-              </a:rPr>
-              <a:t>全能真神</a:t>
+              <a:t>唯有祢是全能真神</a:t>
             </a:r>
           </a:p>
         </p:txBody>
@@ -3864,7 +3750,7 @@
                 <a:latin typeface="Microsoft JhengHei" panose="020B0604030504040204" pitchFamily="34" charset="-120"/>
                 <a:ea typeface="Microsoft JhengHei" panose="020B0604030504040204" pitchFamily="34" charset="-120"/>
               </a:rPr>
-              <a:t>正</a:t>
+              <a:t>正歌</a:t>
             </a:r>
             <a:r>
               <a:rPr lang="en-US" altLang="zh-CN" sz="2800" b="1" dirty="0">
@@ -3890,7 +3776,6 @@
               <a:solidFill>
                 <a:srgbClr val="660033"/>
               </a:solidFill>
-              <a:latin typeface="Microsoft JhengHei" panose="020B0604030504040204" pitchFamily="34" charset="-120"/>
               <a:ea typeface="Microsoft JhengHei" panose="020B0604030504040204" pitchFamily="34" charset="-120"/>
             </a:endParaRPr>
           </a:p>
@@ -3906,13 +3791,6 @@
   <p:clrMapOvr>
     <a:masterClrMapping/>
   </p:clrMapOvr>
-  <p:timing>
-    <p:tnLst>
-      <p:par>
-        <p:cTn id="1" dur="indefinite" restart="never" nodeType="tmRoot"/>
-      </p:par>
-    </p:tnLst>
-  </p:timing>
 </p:sld>
 </file>
 
@@ -4001,25 +3879,8 @@
                 <a:latin typeface="微軟正黑體" pitchFamily="34" charset="-120"/>
                 <a:ea typeface="微軟正黑體" pitchFamily="34" charset="-120"/>
               </a:rPr>
-              <a:t>我們俯伏敬</a:t>
-            </a:r>
-            <a:r>
-              <a:rPr lang="zh-TW" altLang="en-US" sz="4800" b="1" dirty="0">
-                <a:solidFill>
-                  <a:srgbClr val="660033"/>
-                </a:solidFill>
-                <a:latin typeface="微軟正黑體" pitchFamily="34" charset="-120"/>
-                <a:ea typeface="微軟正黑體" pitchFamily="34" charset="-120"/>
-              </a:rPr>
-              <a:t>拜祢</a:t>
-            </a:r>
-            <a:endParaRPr lang="zh-TW" altLang="en-US" sz="4800" b="1" dirty="0">
-              <a:solidFill>
-                <a:srgbClr val="660033"/>
-              </a:solidFill>
-              <a:latin typeface="微軟正黑體" pitchFamily="34" charset="-120"/>
-              <a:ea typeface="微軟正黑體" pitchFamily="34" charset="-120"/>
-            </a:endParaRPr>
+              <a:t>我們俯伏敬拜祢</a:t>
+            </a:r>
           </a:p>
         </p:txBody>
       </p:sp>
@@ -4064,7 +3925,7 @@
                 <a:latin typeface="Microsoft JhengHei" panose="020B0604030504040204" pitchFamily="34" charset="-120"/>
                 <a:ea typeface="Microsoft JhengHei" panose="020B0604030504040204" pitchFamily="34" charset="-120"/>
               </a:rPr>
-              <a:t>正</a:t>
+              <a:t>正歌</a:t>
             </a:r>
             <a:r>
               <a:rPr lang="en-US" altLang="zh-CN" sz="2800" b="1" dirty="0">
@@ -4090,7 +3951,6 @@
               <a:solidFill>
                 <a:srgbClr val="660033"/>
               </a:solidFill>
-              <a:latin typeface="Microsoft JhengHei" panose="020B0604030504040204" pitchFamily="34" charset="-120"/>
               <a:ea typeface="Microsoft JhengHei" panose="020B0604030504040204" pitchFamily="34" charset="-120"/>
             </a:endParaRPr>
           </a:p>
@@ -4106,13 +3966,6 @@
   <p:clrMapOvr>
     <a:masterClrMapping/>
   </p:clrMapOvr>
-  <p:timing>
-    <p:tnLst>
-      <p:par>
-        <p:cTn id="1" dur="indefinite" restart="never" nodeType="tmRoot"/>
-      </p:par>
-    </p:tnLst>
-  </p:timing>
 </p:sld>
 </file>
 
@@ -4166,62 +4019,22 @@
                 <a:latin typeface="微軟正黑體" pitchFamily="34" charset="-120"/>
                 <a:ea typeface="微軟正黑體" pitchFamily="34" charset="-120"/>
               </a:rPr>
-              <a:t>頌讚 </a:t>
-            </a:r>
-            <a:r>
-              <a:rPr lang="zh-TW" altLang="en-US" sz="4800" b="1" dirty="0" smtClean="0">
+              <a:t>頌讚  尊貴  榮耀  權勢</a:t>
+            </a:r>
+          </a:p>
+          <a:p>
+            <a:pPr algn="ctr">
+              <a:buNone/>
+            </a:pPr>
+            <a:r>
+              <a:rPr lang="zh-TW" altLang="en-US" sz="4800" b="1" dirty="0">
                 <a:solidFill>
                   <a:srgbClr val="660033"/>
                 </a:solidFill>
                 <a:latin typeface="微軟正黑體" pitchFamily="34" charset="-120"/>
                 <a:ea typeface="微軟正黑體" pitchFamily="34" charset="-120"/>
               </a:rPr>
-              <a:t> 尊貴  榮耀  權</a:t>
-            </a:r>
-            <a:r>
-              <a:rPr lang="zh-TW" altLang="en-US" sz="4800" b="1" dirty="0">
-                <a:solidFill>
-                  <a:srgbClr val="660033"/>
-                </a:solidFill>
-                <a:latin typeface="微軟正黑體" pitchFamily="34" charset="-120"/>
-                <a:ea typeface="微軟正黑體" pitchFamily="34" charset="-120"/>
-              </a:rPr>
-              <a:t>勢</a:t>
-            </a:r>
-          </a:p>
-          <a:p>
-            <a:pPr algn="ctr">
-              <a:buNone/>
-            </a:pPr>
-            <a:r>
-              <a:rPr lang="zh-TW" altLang="en-US" sz="4800" b="1" dirty="0">
-                <a:solidFill>
-                  <a:srgbClr val="660033"/>
-                </a:solidFill>
-                <a:latin typeface="微軟正黑體" pitchFamily="34" charset="-120"/>
-                <a:ea typeface="微軟正黑體" pitchFamily="34" charset="-120"/>
-              </a:rPr>
-              <a:t>都歸</a:t>
-            </a:r>
-            <a:r>
-              <a:rPr lang="zh-TW" altLang="en-US" sz="4800" b="1" dirty="0">
-                <a:solidFill>
-                  <a:srgbClr val="660033"/>
-                </a:solidFill>
-                <a:latin typeface="微軟正黑體" pitchFamily="34" charset="-120"/>
-                <a:ea typeface="微軟正黑體" pitchFamily="34" charset="-120"/>
-              </a:rPr>
-              <a:t>給祢直</a:t>
-            </a:r>
-            <a:r>
-              <a:rPr lang="zh-TW" altLang="en-US" sz="4800" b="1" dirty="0">
-                <a:solidFill>
-                  <a:srgbClr val="660033"/>
-                </a:solidFill>
-                <a:latin typeface="微軟正黑體" pitchFamily="34" charset="-120"/>
-                <a:ea typeface="微軟正黑體" pitchFamily="34" charset="-120"/>
-              </a:rPr>
-              <a:t>到永遠</a:t>
+              <a:t>都歸給祢直到永遠</a:t>
             </a:r>
           </a:p>
         </p:txBody>
@@ -4267,7 +4080,7 @@
                 <a:latin typeface="Microsoft JhengHei" panose="020B0604030504040204" pitchFamily="34" charset="-120"/>
                 <a:ea typeface="Microsoft JhengHei" panose="020B0604030504040204" pitchFamily="34" charset="-120"/>
               </a:rPr>
-              <a:t>正</a:t>
+              <a:t>正歌</a:t>
             </a:r>
             <a:r>
               <a:rPr lang="en-US" altLang="zh-CN" sz="2800" b="1" dirty="0">
@@ -4293,7 +4106,6 @@
               <a:solidFill>
                 <a:srgbClr val="660033"/>
               </a:solidFill>
-              <a:latin typeface="Microsoft JhengHei" panose="020B0604030504040204" pitchFamily="34" charset="-120"/>
               <a:ea typeface="Microsoft JhengHei" panose="020B0604030504040204" pitchFamily="34" charset="-120"/>
             </a:endParaRPr>
           </a:p>
@@ -4309,13 +4121,6 @@
   <p:clrMapOvr>
     <a:masterClrMapping/>
   </p:clrMapOvr>
-  <p:timing>
-    <p:tnLst>
-      <p:par>
-        <p:cTn id="1" dur="indefinite" restart="never" nodeType="tmRoot"/>
-      </p:par>
-    </p:tnLst>
-  </p:timing>
 </p:sld>
 </file>
 
@@ -4369,62 +4174,22 @@
                 <a:latin typeface="微軟正黑體" pitchFamily="34" charset="-120"/>
                 <a:ea typeface="微軟正黑體" pitchFamily="34" charset="-120"/>
               </a:rPr>
-              <a:t>萬王之王 </a:t>
-            </a:r>
-            <a:r>
-              <a:rPr lang="zh-TW" altLang="en-US" sz="4800" b="1" dirty="0" smtClean="0">
+              <a:t>萬王之王   萬主之主</a:t>
+            </a:r>
+          </a:p>
+          <a:p>
+            <a:pPr algn="ctr">
+              <a:buNone/>
+            </a:pPr>
+            <a:r>
+              <a:rPr lang="zh-TW" altLang="en-US" sz="4800" b="1" dirty="0">
                 <a:solidFill>
                   <a:srgbClr val="660033"/>
                 </a:solidFill>
                 <a:latin typeface="微軟正黑體" pitchFamily="34" charset="-120"/>
                 <a:ea typeface="微軟正黑體" pitchFamily="34" charset="-120"/>
               </a:rPr>
-              <a:t>  萬</a:t>
-            </a:r>
-            <a:r>
-              <a:rPr lang="zh-TW" altLang="en-US" sz="4800" b="1" dirty="0">
-                <a:solidFill>
-                  <a:srgbClr val="660033"/>
-                </a:solidFill>
-                <a:latin typeface="微軟正黑體" pitchFamily="34" charset="-120"/>
-                <a:ea typeface="微軟正黑體" pitchFamily="34" charset="-120"/>
-              </a:rPr>
-              <a:t>主之主</a:t>
-            </a:r>
-          </a:p>
-          <a:p>
-            <a:pPr algn="ctr">
-              <a:buNone/>
-            </a:pPr>
-            <a:r>
-              <a:rPr lang="zh-TW" altLang="en-US" sz="4800" b="1" dirty="0">
-                <a:solidFill>
-                  <a:srgbClr val="660033"/>
-                </a:solidFill>
-                <a:latin typeface="微軟正黑體" pitchFamily="34" charset="-120"/>
-                <a:ea typeface="微軟正黑體" pitchFamily="34" charset="-120"/>
-              </a:rPr>
-              <a:t>唯</a:t>
-            </a:r>
-            <a:r>
-              <a:rPr lang="zh-TW" altLang="en-US" sz="4800" b="1" dirty="0">
-                <a:solidFill>
-                  <a:srgbClr val="660033"/>
-                </a:solidFill>
-                <a:latin typeface="微軟正黑體" pitchFamily="34" charset="-120"/>
-                <a:ea typeface="微軟正黑體" pitchFamily="34" charset="-120"/>
-              </a:rPr>
-              <a:t>有祢配</a:t>
-            </a:r>
-            <a:r>
-              <a:rPr lang="zh-TW" altLang="en-US" sz="4800" b="1" dirty="0">
-                <a:solidFill>
-                  <a:srgbClr val="660033"/>
-                </a:solidFill>
-                <a:latin typeface="微軟正黑體" pitchFamily="34" charset="-120"/>
-                <a:ea typeface="微軟正黑體" pitchFamily="34" charset="-120"/>
-              </a:rPr>
-              <a:t>得</a:t>
+              <a:t>唯有祢配得</a:t>
             </a:r>
             <a:r>
               <a:rPr lang="zh-CN" altLang="en-US" sz="4800" b="1" dirty="0">
@@ -4490,7 +4255,7 @@
                 <a:latin typeface="Microsoft JhengHei" panose="020B0604030504040204" pitchFamily="34" charset="-120"/>
                 <a:ea typeface="Microsoft JhengHei" panose="020B0604030504040204" pitchFamily="34" charset="-120"/>
               </a:rPr>
-              <a:t>副</a:t>
+              <a:t>副歌</a:t>
             </a:r>
             <a:r>
               <a:rPr lang="en-US" altLang="zh-CN" sz="2800" b="1" dirty="0">
@@ -4532,13 +4297,6 @@
   <p:clrMapOvr>
     <a:masterClrMapping/>
   </p:clrMapOvr>
-  <p:timing>
-    <p:tnLst>
-      <p:par>
-        <p:cTn id="1" dur="indefinite" restart="never" nodeType="tmRoot"/>
-      </p:par>
-    </p:tnLst>
-  </p:timing>
 </p:sld>
 </file>
 
@@ -4592,62 +4350,22 @@
                 <a:latin typeface="微軟正黑體" pitchFamily="34" charset="-120"/>
                 <a:ea typeface="微軟正黑體" pitchFamily="34" charset="-120"/>
               </a:rPr>
-              <a:t>萬王之王 </a:t>
-            </a:r>
-            <a:r>
-              <a:rPr lang="zh-TW" altLang="en-US" sz="4800" b="1" dirty="0" smtClean="0">
+              <a:t>萬王之王   萬主之主</a:t>
+            </a:r>
+          </a:p>
+          <a:p>
+            <a:pPr algn="ctr">
+              <a:buNone/>
+            </a:pPr>
+            <a:r>
+              <a:rPr lang="zh-TW" altLang="en-US" sz="4800" b="1" dirty="0">
                 <a:solidFill>
                   <a:srgbClr val="660033"/>
                 </a:solidFill>
                 <a:latin typeface="微軟正黑體" pitchFamily="34" charset="-120"/>
                 <a:ea typeface="微軟正黑體" pitchFamily="34" charset="-120"/>
               </a:rPr>
-              <a:t>  萬</a:t>
-            </a:r>
-            <a:r>
-              <a:rPr lang="zh-TW" altLang="en-US" sz="4800" b="1" dirty="0">
-                <a:solidFill>
-                  <a:srgbClr val="660033"/>
-                </a:solidFill>
-                <a:latin typeface="微軟正黑體" pitchFamily="34" charset="-120"/>
-                <a:ea typeface="微軟正黑體" pitchFamily="34" charset="-120"/>
-              </a:rPr>
-              <a:t>主之主</a:t>
-            </a:r>
-          </a:p>
-          <a:p>
-            <a:pPr algn="ctr">
-              <a:buNone/>
-            </a:pPr>
-            <a:r>
-              <a:rPr lang="zh-TW" altLang="en-US" sz="4800" b="1" dirty="0">
-                <a:solidFill>
-                  <a:srgbClr val="660033"/>
-                </a:solidFill>
-                <a:latin typeface="微軟正黑體" pitchFamily="34" charset="-120"/>
-                <a:ea typeface="微軟正黑體" pitchFamily="34" charset="-120"/>
-              </a:rPr>
-              <a:t>我們高</a:t>
-            </a:r>
-            <a:r>
-              <a:rPr lang="zh-TW" altLang="en-US" sz="4800" b="1" dirty="0">
-                <a:solidFill>
-                  <a:srgbClr val="660033"/>
-                </a:solidFill>
-                <a:latin typeface="微軟正黑體" pitchFamily="34" charset="-120"/>
-                <a:ea typeface="微軟正黑體" pitchFamily="34" charset="-120"/>
-              </a:rPr>
-              <a:t>舉祢聖</a:t>
-            </a:r>
-            <a:r>
-              <a:rPr lang="zh-TW" altLang="en-US" sz="4800" b="1" dirty="0">
-                <a:solidFill>
-                  <a:srgbClr val="660033"/>
-                </a:solidFill>
-                <a:latin typeface="微軟正黑體" pitchFamily="34" charset="-120"/>
-                <a:ea typeface="微軟正黑體" pitchFamily="34" charset="-120"/>
-              </a:rPr>
-              <a:t>名直到永遠</a:t>
+              <a:t>我們高舉祢聖名直到永遠</a:t>
             </a:r>
           </a:p>
         </p:txBody>
@@ -4693,7 +4411,17 @@
                 <a:latin typeface="Microsoft JhengHei" panose="020B0604030504040204" pitchFamily="34" charset="-120"/>
                 <a:ea typeface="Microsoft JhengHei" panose="020B0604030504040204" pitchFamily="34" charset="-120"/>
               </a:rPr>
-              <a:t>副 </a:t>
+              <a:t>副歌</a:t>
+            </a:r>
+            <a:r>
+              <a:rPr lang="en-US" altLang="zh-CN" sz="2800" b="1" dirty="0">
+                <a:solidFill>
+                  <a:srgbClr val="660033"/>
+                </a:solidFill>
+                <a:latin typeface="Microsoft JhengHei" panose="020B0604030504040204" pitchFamily="34" charset="-120"/>
+                <a:ea typeface="Microsoft JhengHei" panose="020B0604030504040204" pitchFamily="34" charset="-120"/>
+              </a:rPr>
+              <a:t> </a:t>
             </a:r>
             <a:r>
               <a:rPr lang="en-US" sz="2800" b="1" dirty="0">
@@ -4725,13 +4453,6 @@
   <p:clrMapOvr>
     <a:masterClrMapping/>
   </p:clrMapOvr>
-  <p:timing>
-    <p:tnLst>
-      <p:par>
-        <p:cTn id="1" dur="indefinite" restart="never" nodeType="tmRoot"/>
-      </p:par>
-    </p:tnLst>
-  </p:timing>
 </p:sld>
 </file>
 
